--- a/class/cloud_infra_mgmt/07주차_Kubernetes핵심3/01_강의자료/1차시_Ingress개념.pptx
+++ b/class/cloud_infra_mgmt/07주차_Kubernetes핵심3/01_강의자료/1차시_Ingress개념.pptx
@@ -8830,7 +8830,7 @@
               </a:lnSpc>
             </a:pPr>
             <a:r>
-              <a:rPr sz="1500" b="1">
+              <a:rPr sz="1700" b="1">
                 <a:solidFill>
                   <a:srgbClr val="0D9488"/>
                 </a:solidFill>
@@ -8839,7 +8839,7 @@
               <a:t>●  </a:t>
             </a:r>
             <a:r>
-              <a:rPr sz="1500" b="0">
+              <a:rPr sz="1700" b="0">
                 <a:solidFill>
                   <a:srgbClr val="222733"/>
                 </a:solidFill>
@@ -8855,7 +8855,7 @@
               </a:lnSpc>
             </a:pPr>
             <a:r>
-              <a:rPr sz="1500" b="1">
+              <a:rPr sz="1700" b="1">
                 <a:solidFill>
                   <a:srgbClr val="0D9488"/>
                 </a:solidFill>
@@ -8864,7 +8864,7 @@
               <a:t>●  </a:t>
             </a:r>
             <a:r>
-              <a:rPr sz="1500" b="0">
+              <a:rPr sz="1700" b="0">
                 <a:solidFill>
                   <a:srgbClr val="222733"/>
                 </a:solidFill>
@@ -8880,7 +8880,7 @@
               </a:lnSpc>
             </a:pPr>
             <a:r>
-              <a:rPr sz="1500" b="1">
+              <a:rPr sz="1700" b="1">
                 <a:solidFill>
                   <a:srgbClr val="0D9488"/>
                 </a:solidFill>
@@ -8889,7 +8889,7 @@
               <a:t>●  </a:t>
             </a:r>
             <a:r>
-              <a:rPr sz="1500" b="0">
+              <a:rPr sz="1700" b="0">
                 <a:solidFill>
                   <a:srgbClr val="222733"/>
                 </a:solidFill>

--- a/class/cloud_infra_mgmt/07주차_Kubernetes핵심3/01_강의자료/1차시_Ingress개념.pptx
+++ b/class/cloud_infra_mgmt/07주차_Kubernetes핵심3/01_강의자료/1차시_Ingress개념.pptx
@@ -5125,7 +5125,7 @@
           <a:p>
             <a:pPr>
               <a:lnSpc>
-                <a:spcPct val="115000"/>
+                <a:spcPct val="149500"/>
               </a:lnSpc>
             </a:pPr>
             <a:r>
@@ -5150,7 +5150,7 @@
           <a:p>
             <a:pPr>
               <a:lnSpc>
-                <a:spcPct val="115000"/>
+                <a:spcPct val="149500"/>
               </a:lnSpc>
             </a:pPr>
             <a:r>
@@ -5175,7 +5175,7 @@
           <a:p>
             <a:pPr>
               <a:lnSpc>
-                <a:spcPct val="115000"/>
+                <a:spcPct val="149500"/>
               </a:lnSpc>
             </a:pPr>
             <a:r>
@@ -6424,16 +6424,104 @@
       </p:sp>
       <p:sp>
         <p:nvSpPr>
-          <p:cNvPr id="7" name="Isosceles Triangle 6"/>
+          <p:cNvPr id="7" name="Rectangle 6"/>
           <p:cNvSpPr/>
           <p:nvPr/>
         </p:nvSpPr>
         <p:spPr>
-          <a:xfrm rot="5400000">
-            <a:off x="3495751" y="1673352"/>
-            <a:ext cx="146304" cy="146304"/>
-          </a:xfrm>
-          <a:prstGeom prst="triangle">
+          <a:xfrm>
+            <a:off x="5096865" y="1730959"/>
+            <a:ext cx="1995220" cy="31089"/>
+          </a:xfrm>
+          <a:prstGeom prst="rect">
+            <a:avLst/>
+          </a:prstGeom>
+          <a:solidFill>
+            <a:srgbClr val="14B8A6"/>
+          </a:solidFill>
+          <a:ln>
+            <a:noFill/>
+          </a:ln>
+          <a:effectLst/>
+        </p:spPr>
+        <p:style>
+          <a:lnRef idx="1">
+            <a:schemeClr val="accent1"/>
+          </a:lnRef>
+          <a:fillRef idx="3">
+            <a:schemeClr val="accent1"/>
+          </a:fillRef>
+          <a:effectRef idx="2">
+            <a:schemeClr val="accent1"/>
+          </a:effectRef>
+          <a:fontRef idx="minor">
+            <a:schemeClr val="lt1"/>
+          </a:fontRef>
+        </p:style>
+        <p:txBody>
+          <a:bodyPr rtlCol="0" anchor="ctr"/>
+          <a:lstStyle/>
+          <a:p>
+            <a:pPr algn="ctr"/>
+          </a:p>
+        </p:txBody>
+      </p:sp>
+      <p:sp>
+        <p:nvSpPr>
+          <p:cNvPr id="8" name="Rectangle 7"/>
+          <p:cNvSpPr/>
+          <p:nvPr/>
+        </p:nvSpPr>
+        <p:spPr>
+          <a:xfrm>
+            <a:off x="7622438" y="1730959"/>
+            <a:ext cx="1995220" cy="31089"/>
+          </a:xfrm>
+          <a:prstGeom prst="rect">
+            <a:avLst/>
+          </a:prstGeom>
+          <a:solidFill>
+            <a:srgbClr val="14B8A6"/>
+          </a:solidFill>
+          <a:ln>
+            <a:noFill/>
+          </a:ln>
+          <a:effectLst/>
+        </p:spPr>
+        <p:style>
+          <a:lnRef idx="1">
+            <a:schemeClr val="accent1"/>
+          </a:lnRef>
+          <a:fillRef idx="3">
+            <a:schemeClr val="accent1"/>
+          </a:fillRef>
+          <a:effectRef idx="2">
+            <a:schemeClr val="accent1"/>
+          </a:effectRef>
+          <a:fontRef idx="minor">
+            <a:schemeClr val="lt1"/>
+          </a:fontRef>
+        </p:style>
+        <p:txBody>
+          <a:bodyPr rtlCol="0" anchor="ctr"/>
+          <a:lstStyle/>
+          <a:p>
+            <a:pPr algn="ctr"/>
+          </a:p>
+        </p:txBody>
+      </p:sp>
+      <p:sp>
+        <p:nvSpPr>
+          <p:cNvPr id="9" name="Oval 8"/>
+          <p:cNvSpPr/>
+          <p:nvPr/>
+        </p:nvSpPr>
+        <p:spPr>
+          <a:xfrm>
+            <a:off x="2040940" y="1481328"/>
+            <a:ext cx="530352" cy="530352"/>
+          </a:xfrm>
+          <a:prstGeom prst="ellipse">
             <a:avLst/>
           </a:prstGeom>
           <a:solidFill>
@@ -6468,227 +6556,7 @@
       </p:sp>
       <p:sp>
         <p:nvSpPr>
-          <p:cNvPr id="8" name="Rectangle 7"/>
-          <p:cNvSpPr/>
-          <p:nvPr/>
-        </p:nvSpPr>
-        <p:spPr>
-          <a:xfrm>
-            <a:off x="5096865" y="1730959"/>
-            <a:ext cx="1995220" cy="31089"/>
-          </a:xfrm>
-          <a:prstGeom prst="rect">
-            <a:avLst/>
-          </a:prstGeom>
-          <a:solidFill>
-            <a:srgbClr val="14B8A6"/>
-          </a:solidFill>
-          <a:ln>
-            <a:noFill/>
-          </a:ln>
-          <a:effectLst/>
-        </p:spPr>
-        <p:style>
-          <a:lnRef idx="1">
-            <a:schemeClr val="accent1"/>
-          </a:lnRef>
-          <a:fillRef idx="3">
-            <a:schemeClr val="accent1"/>
-          </a:fillRef>
-          <a:effectRef idx="2">
-            <a:schemeClr val="accent1"/>
-          </a:effectRef>
-          <a:fontRef idx="minor">
-            <a:schemeClr val="lt1"/>
-          </a:fontRef>
-        </p:style>
-        <p:txBody>
-          <a:bodyPr rtlCol="0" anchor="ctr"/>
-          <a:lstStyle/>
-          <a:p>
-            <a:pPr algn="ctr"/>
-          </a:p>
-        </p:txBody>
-      </p:sp>
-      <p:sp>
-        <p:nvSpPr>
-          <p:cNvPr id="9" name="Isosceles Triangle 8"/>
-          <p:cNvSpPr/>
-          <p:nvPr/>
-        </p:nvSpPr>
-        <p:spPr>
-          <a:xfrm rot="5400000">
-            <a:off x="6021324" y="1673352"/>
-            <a:ext cx="146304" cy="146304"/>
-          </a:xfrm>
-          <a:prstGeom prst="triangle">
-            <a:avLst/>
-          </a:prstGeom>
-          <a:solidFill>
-            <a:srgbClr val="0D9488"/>
-          </a:solidFill>
-          <a:ln>
-            <a:noFill/>
-          </a:ln>
-          <a:effectLst/>
-        </p:spPr>
-        <p:style>
-          <a:lnRef idx="1">
-            <a:schemeClr val="accent1"/>
-          </a:lnRef>
-          <a:fillRef idx="3">
-            <a:schemeClr val="accent1"/>
-          </a:fillRef>
-          <a:effectRef idx="2">
-            <a:schemeClr val="accent1"/>
-          </a:effectRef>
-          <a:fontRef idx="minor">
-            <a:schemeClr val="lt1"/>
-          </a:fontRef>
-        </p:style>
-        <p:txBody>
-          <a:bodyPr rtlCol="0" anchor="ctr"/>
-          <a:lstStyle/>
-          <a:p>
-            <a:pPr algn="ctr"/>
-          </a:p>
-        </p:txBody>
-      </p:sp>
-      <p:sp>
-        <p:nvSpPr>
-          <p:cNvPr id="10" name="Rectangle 9"/>
-          <p:cNvSpPr/>
-          <p:nvPr/>
-        </p:nvSpPr>
-        <p:spPr>
-          <a:xfrm>
-            <a:off x="7622438" y="1730959"/>
-            <a:ext cx="1995220" cy="31089"/>
-          </a:xfrm>
-          <a:prstGeom prst="rect">
-            <a:avLst/>
-          </a:prstGeom>
-          <a:solidFill>
-            <a:srgbClr val="14B8A6"/>
-          </a:solidFill>
-          <a:ln>
-            <a:noFill/>
-          </a:ln>
-          <a:effectLst/>
-        </p:spPr>
-        <p:style>
-          <a:lnRef idx="1">
-            <a:schemeClr val="accent1"/>
-          </a:lnRef>
-          <a:fillRef idx="3">
-            <a:schemeClr val="accent1"/>
-          </a:fillRef>
-          <a:effectRef idx="2">
-            <a:schemeClr val="accent1"/>
-          </a:effectRef>
-          <a:fontRef idx="minor">
-            <a:schemeClr val="lt1"/>
-          </a:fontRef>
-        </p:style>
-        <p:txBody>
-          <a:bodyPr rtlCol="0" anchor="ctr"/>
-          <a:lstStyle/>
-          <a:p>
-            <a:pPr algn="ctr"/>
-          </a:p>
-        </p:txBody>
-      </p:sp>
-      <p:sp>
-        <p:nvSpPr>
-          <p:cNvPr id="11" name="Isosceles Triangle 10"/>
-          <p:cNvSpPr/>
-          <p:nvPr/>
-        </p:nvSpPr>
-        <p:spPr>
-          <a:xfrm rot="5400000">
-            <a:off x="8546896" y="1673352"/>
-            <a:ext cx="146304" cy="146304"/>
-          </a:xfrm>
-          <a:prstGeom prst="triangle">
-            <a:avLst/>
-          </a:prstGeom>
-          <a:solidFill>
-            <a:srgbClr val="0D9488"/>
-          </a:solidFill>
-          <a:ln>
-            <a:noFill/>
-          </a:ln>
-          <a:effectLst/>
-        </p:spPr>
-        <p:style>
-          <a:lnRef idx="1">
-            <a:schemeClr val="accent1"/>
-          </a:lnRef>
-          <a:fillRef idx="3">
-            <a:schemeClr val="accent1"/>
-          </a:fillRef>
-          <a:effectRef idx="2">
-            <a:schemeClr val="accent1"/>
-          </a:effectRef>
-          <a:fontRef idx="minor">
-            <a:schemeClr val="lt1"/>
-          </a:fontRef>
-        </p:style>
-        <p:txBody>
-          <a:bodyPr rtlCol="0" anchor="ctr"/>
-          <a:lstStyle/>
-          <a:p>
-            <a:pPr algn="ctr"/>
-          </a:p>
-        </p:txBody>
-      </p:sp>
-      <p:sp>
-        <p:nvSpPr>
-          <p:cNvPr id="12" name="Oval 11"/>
-          <p:cNvSpPr/>
-          <p:nvPr/>
-        </p:nvSpPr>
-        <p:spPr>
-          <a:xfrm>
-            <a:off x="2040940" y="1481328"/>
-            <a:ext cx="530352" cy="530352"/>
-          </a:xfrm>
-          <a:prstGeom prst="ellipse">
-            <a:avLst/>
-          </a:prstGeom>
-          <a:solidFill>
-            <a:srgbClr val="0D9488"/>
-          </a:solidFill>
-          <a:ln>
-            <a:noFill/>
-          </a:ln>
-          <a:effectLst/>
-        </p:spPr>
-        <p:style>
-          <a:lnRef idx="1">
-            <a:schemeClr val="accent1"/>
-          </a:lnRef>
-          <a:fillRef idx="3">
-            <a:schemeClr val="accent1"/>
-          </a:fillRef>
-          <a:effectRef idx="2">
-            <a:schemeClr val="accent1"/>
-          </a:effectRef>
-          <a:fontRef idx="minor">
-            <a:schemeClr val="lt1"/>
-          </a:fontRef>
-        </p:style>
-        <p:txBody>
-          <a:bodyPr rtlCol="0" anchor="ctr"/>
-          <a:lstStyle/>
-          <a:p>
-            <a:pPr algn="ctr"/>
-          </a:p>
-        </p:txBody>
-      </p:sp>
-      <p:sp>
-        <p:nvSpPr>
-          <p:cNvPr id="13" name="TextBox 12"/>
+          <p:cNvPr id="10" name="TextBox 9"/>
           <p:cNvSpPr txBox="1"/>
           <p:nvPr/>
         </p:nvSpPr>
@@ -6723,7 +6591,7 @@
       </p:sp>
       <p:sp>
         <p:nvSpPr>
-          <p:cNvPr id="14" name="Rounded Rectangle 13"/>
+          <p:cNvPr id="11" name="Rounded Rectangle 10"/>
           <p:cNvSpPr/>
           <p:nvPr/>
         </p:nvSpPr>
@@ -6771,7 +6639,7 @@
       </p:sp>
       <p:sp>
         <p:nvSpPr>
-          <p:cNvPr id="15" name="TextBox 14"/>
+          <p:cNvPr id="12" name="TextBox 11"/>
           <p:cNvSpPr txBox="1"/>
           <p:nvPr/>
         </p:nvSpPr>
@@ -6806,7 +6674,7 @@
       </p:sp>
       <p:sp>
         <p:nvSpPr>
-          <p:cNvPr id="16" name="TextBox 15"/>
+          <p:cNvPr id="13" name="TextBox 12"/>
           <p:cNvSpPr txBox="1"/>
           <p:nvPr/>
         </p:nvSpPr>
@@ -6845,7 +6713,7 @@
       </p:sp>
       <p:sp>
         <p:nvSpPr>
-          <p:cNvPr id="17" name="Oval 16"/>
+          <p:cNvPr id="14" name="Oval 13"/>
           <p:cNvSpPr/>
           <p:nvPr/>
         </p:nvSpPr>
@@ -6889,7 +6757,7 @@
       </p:sp>
       <p:sp>
         <p:nvSpPr>
-          <p:cNvPr id="18" name="TextBox 17"/>
+          <p:cNvPr id="15" name="TextBox 14"/>
           <p:cNvSpPr txBox="1"/>
           <p:nvPr/>
         </p:nvSpPr>
@@ -6924,7 +6792,7 @@
       </p:sp>
       <p:sp>
         <p:nvSpPr>
-          <p:cNvPr id="19" name="Rounded Rectangle 18"/>
+          <p:cNvPr id="16" name="Rounded Rectangle 15"/>
           <p:cNvSpPr/>
           <p:nvPr/>
         </p:nvSpPr>
@@ -6972,7 +6840,7 @@
       </p:sp>
       <p:sp>
         <p:nvSpPr>
-          <p:cNvPr id="20" name="TextBox 19"/>
+          <p:cNvPr id="17" name="TextBox 16"/>
           <p:cNvSpPr txBox="1"/>
           <p:nvPr/>
         </p:nvSpPr>
@@ -7007,7 +6875,7 @@
       </p:sp>
       <p:sp>
         <p:nvSpPr>
-          <p:cNvPr id="21" name="TextBox 20"/>
+          <p:cNvPr id="18" name="TextBox 17"/>
           <p:cNvSpPr txBox="1"/>
           <p:nvPr/>
         </p:nvSpPr>
@@ -7046,7 +6914,7 @@
       </p:sp>
       <p:sp>
         <p:nvSpPr>
-          <p:cNvPr id="22" name="Oval 21"/>
+          <p:cNvPr id="19" name="Oval 18"/>
           <p:cNvSpPr/>
           <p:nvPr/>
         </p:nvSpPr>
@@ -7090,7 +6958,7 @@
       </p:sp>
       <p:sp>
         <p:nvSpPr>
-          <p:cNvPr id="23" name="TextBox 22"/>
+          <p:cNvPr id="20" name="TextBox 19"/>
           <p:cNvSpPr txBox="1"/>
           <p:nvPr/>
         </p:nvSpPr>
@@ -7125,7 +6993,7 @@
       </p:sp>
       <p:sp>
         <p:nvSpPr>
-          <p:cNvPr id="24" name="Rounded Rectangle 23"/>
+          <p:cNvPr id="21" name="Rounded Rectangle 20"/>
           <p:cNvSpPr/>
           <p:nvPr/>
         </p:nvSpPr>
@@ -7173,7 +7041,7 @@
       </p:sp>
       <p:sp>
         <p:nvSpPr>
-          <p:cNvPr id="25" name="TextBox 24"/>
+          <p:cNvPr id="22" name="TextBox 21"/>
           <p:cNvSpPr txBox="1"/>
           <p:nvPr/>
         </p:nvSpPr>
@@ -7208,7 +7076,7 @@
       </p:sp>
       <p:sp>
         <p:nvSpPr>
-          <p:cNvPr id="26" name="TextBox 25"/>
+          <p:cNvPr id="23" name="TextBox 22"/>
           <p:cNvSpPr txBox="1"/>
           <p:nvPr/>
         </p:nvSpPr>
@@ -7247,7 +7115,7 @@
       </p:sp>
       <p:sp>
         <p:nvSpPr>
-          <p:cNvPr id="27" name="Oval 26"/>
+          <p:cNvPr id="24" name="Oval 23"/>
           <p:cNvSpPr/>
           <p:nvPr/>
         </p:nvSpPr>
@@ -7291,7 +7159,7 @@
       </p:sp>
       <p:sp>
         <p:nvSpPr>
-          <p:cNvPr id="28" name="TextBox 27"/>
+          <p:cNvPr id="25" name="TextBox 24"/>
           <p:cNvSpPr txBox="1"/>
           <p:nvPr/>
         </p:nvSpPr>
@@ -7326,7 +7194,7 @@
       </p:sp>
       <p:sp>
         <p:nvSpPr>
-          <p:cNvPr id="29" name="Rounded Rectangle 28"/>
+          <p:cNvPr id="26" name="Rounded Rectangle 25"/>
           <p:cNvSpPr/>
           <p:nvPr/>
         </p:nvSpPr>
@@ -7374,7 +7242,7 @@
       </p:sp>
       <p:sp>
         <p:nvSpPr>
-          <p:cNvPr id="30" name="TextBox 29"/>
+          <p:cNvPr id="27" name="TextBox 26"/>
           <p:cNvSpPr txBox="1"/>
           <p:nvPr/>
         </p:nvSpPr>
@@ -7409,7 +7277,7 @@
       </p:sp>
       <p:sp>
         <p:nvSpPr>
-          <p:cNvPr id="31" name="TextBox 30"/>
+          <p:cNvPr id="28" name="TextBox 27"/>
           <p:cNvSpPr txBox="1"/>
           <p:nvPr/>
         </p:nvSpPr>
@@ -7448,7 +7316,7 @@
       </p:sp>
       <p:sp>
         <p:nvSpPr>
-          <p:cNvPr id="32" name="TextBox 31"/>
+          <p:cNvPr id="29" name="TextBox 28"/>
           <p:cNvSpPr txBox="1"/>
           <p:nvPr/>
         </p:nvSpPr>
@@ -7483,7 +7351,7 @@
       </p:sp>
       <p:sp>
         <p:nvSpPr>
-          <p:cNvPr id="33" name="TextBox 32"/>
+          <p:cNvPr id="30" name="TextBox 29"/>
           <p:cNvSpPr txBox="1"/>
           <p:nvPr/>
         </p:nvSpPr>
@@ -7518,7 +7386,7 @@
       </p:sp>
       <p:sp>
         <p:nvSpPr>
-          <p:cNvPr id="34" name="Rectangle 33"/>
+          <p:cNvPr id="31" name="Rectangle 30"/>
           <p:cNvSpPr/>
           <p:nvPr/>
         </p:nvSpPr>
@@ -8042,7 +7910,7 @@
           <a:p>
             <a:pPr>
               <a:lnSpc>
-                <a:spcPct val="115000"/>
+                <a:spcPct val="149500"/>
               </a:lnSpc>
             </a:pPr>
             <a:r>
@@ -8067,7 +7935,7 @@
           <a:p>
             <a:pPr>
               <a:lnSpc>
-                <a:spcPct val="115000"/>
+                <a:spcPct val="149500"/>
               </a:lnSpc>
             </a:pPr>
             <a:r>
@@ -8092,7 +7960,7 @@
           <a:p>
             <a:pPr>
               <a:lnSpc>
-                <a:spcPct val="115000"/>
+                <a:spcPct val="149500"/>
               </a:lnSpc>
             </a:pPr>
             <a:r>
@@ -8826,7 +8694,7 @@
           <a:p>
             <a:pPr>
               <a:lnSpc>
-                <a:spcPct val="115000"/>
+                <a:spcPct val="149500"/>
               </a:lnSpc>
             </a:pPr>
             <a:r>
@@ -8851,7 +8719,7 @@
           <a:p>
             <a:pPr>
               <a:lnSpc>
-                <a:spcPct val="115000"/>
+                <a:spcPct val="149500"/>
               </a:lnSpc>
             </a:pPr>
             <a:r>
@@ -8876,7 +8744,7 @@
           <a:p>
             <a:pPr>
               <a:lnSpc>
-                <a:spcPct val="115000"/>
+                <a:spcPct val="149500"/>
               </a:lnSpc>
             </a:pPr>
             <a:r>
@@ -9539,7 +9407,7 @@
           <a:p>
             <a:pPr>
               <a:lnSpc>
-                <a:spcPct val="115000"/>
+                <a:spcPct val="149500"/>
               </a:lnSpc>
             </a:pPr>
             <a:r>
@@ -9564,7 +9432,7 @@
           <a:p>
             <a:pPr>
               <a:lnSpc>
-                <a:spcPct val="115000"/>
+                <a:spcPct val="149500"/>
               </a:lnSpc>
             </a:pPr>
             <a:r>
@@ -9589,7 +9457,7 @@
           <a:p>
             <a:pPr>
               <a:lnSpc>
-                <a:spcPct val="115000"/>
+                <a:spcPct val="149500"/>
               </a:lnSpc>
             </a:pPr>
             <a:r>
@@ -9980,7 +9848,7 @@
           <a:p>
             <a:pPr>
               <a:lnSpc>
-                <a:spcPct val="115000"/>
+                <a:spcPct val="149500"/>
               </a:lnSpc>
             </a:pPr>
             <a:r>
@@ -10005,7 +9873,7 @@
           <a:p>
             <a:pPr>
               <a:lnSpc>
-                <a:spcPct val="115000"/>
+                <a:spcPct val="149500"/>
               </a:lnSpc>
             </a:pPr>
             <a:r>
@@ -10030,7 +9898,7 @@
           <a:p>
             <a:pPr>
               <a:lnSpc>
-                <a:spcPct val="115000"/>
+                <a:spcPct val="149500"/>
               </a:lnSpc>
             </a:pPr>
             <a:r>

--- a/class/cloud_infra_mgmt/07주차_Kubernetes핵심3/01_강의자료/1차시_Ingress개념.pptx
+++ b/class/cloud_infra_mgmt/07주차_Kubernetes핵심3/01_강의자료/1차시_Ingress개념.pptx
@@ -4761,6 +4761,8 @@
                   <a:srgbClr val="14B8A6"/>
                 </a:solidFill>
                 <a:latin typeface="맑은 고딕"/>
+                <a:ea typeface="맑은 고딕"/>
+                <a:cs typeface="맑은 고딕"/>
               </a:rPr>
               <a:t>클라우드인프라관리  ·  7주차 1차시</a:t>
             </a:r>
@@ -4796,6 +4798,8 @@
                   <a:srgbClr val="FFFFFF"/>
                 </a:solidFill>
                 <a:latin typeface="맑은 고딕"/>
+                <a:ea typeface="맑은 고딕"/>
+                <a:cs typeface="맑은 고딕"/>
               </a:rPr>
               <a:t>Ingress 개념</a:t>
             </a:r>
@@ -4831,6 +4835,8 @@
                   <a:srgbClr val="C9D3E6"/>
                 </a:solidFill>
                 <a:latin typeface="맑은 고딕"/>
+                <a:ea typeface="맑은 고딕"/>
+                <a:cs typeface="맑은 고딕"/>
               </a:rPr>
               <a:t>여러 서비스를 하나의 진입점으로</a:t>
             </a:r>
@@ -4866,6 +4872,8 @@
                   <a:srgbClr val="FFFFFF"/>
                 </a:solidFill>
                 <a:latin typeface="맑은 고딕"/>
+                <a:ea typeface="맑은 고딕"/>
+                <a:cs typeface="맑은 고딕"/>
               </a:rPr>
               <a:t>영남이공대학교 김지윤교수</a:t>
             </a:r>
@@ -5025,6 +5033,8 @@
                   <a:srgbClr val="14213D"/>
                 </a:solidFill>
                 <a:latin typeface="맑은 고딕"/>
+                <a:ea typeface="맑은 고딕"/>
+                <a:cs typeface="맑은 고딕"/>
               </a:rPr>
               <a:t>03</a:t>
             </a:r>
@@ -5060,6 +5070,8 @@
                   <a:srgbClr val="14B8A6"/>
                 </a:solidFill>
                 <a:latin typeface="맑은 고딕"/>
+                <a:ea typeface="맑은 고딕"/>
+                <a:cs typeface="맑은 고딕"/>
               </a:rPr>
               <a:t>실습 안내</a:t>
             </a:r>
@@ -5095,6 +5107,8 @@
                   <a:srgbClr val="FFFFFF"/>
                 </a:solidFill>
                 <a:latin typeface="맑은 고딕"/>
+                <a:ea typeface="맑은 고딕"/>
+                <a:cs typeface="맑은 고딕"/>
               </a:rPr>
               <a:t>VM 안내</a:t>
             </a:r>
@@ -5134,6 +5148,8 @@
                   <a:srgbClr val="0D9488"/>
                 </a:solidFill>
                 <a:latin typeface="맑은 고딕"/>
+                <a:ea typeface="맑은 고딕"/>
+                <a:cs typeface="맑은 고딕"/>
               </a:rPr>
               <a:t>●  </a:t>
             </a:r>
@@ -5143,6 +5159,8 @@
                   <a:srgbClr val="222733"/>
                 </a:solidFill>
                 <a:latin typeface="맑은 고딕"/>
+                <a:ea typeface="맑은 고딕"/>
+                <a:cs typeface="맑은 고딕"/>
               </a:rPr>
               <a:t>개인 VM에서도 minikube addons enable ingress 실행</a:t>
             </a:r>
@@ -5159,6 +5177,8 @@
                   <a:srgbClr val="0D9488"/>
                 </a:solidFill>
                 <a:latin typeface="맑은 고딕"/>
+                <a:ea typeface="맑은 고딕"/>
+                <a:cs typeface="맑은 고딕"/>
               </a:rPr>
               <a:t>●  </a:t>
             </a:r>
@@ -5168,6 +5188,8 @@
                   <a:srgbClr val="222733"/>
                 </a:solidFill>
                 <a:latin typeface="맑은 고딕"/>
+                <a:ea typeface="맑은 고딕"/>
+                <a:cs typeface="맑은 고딕"/>
               </a:rPr>
               <a:t>kubectl get pods -n ingress-nginx 로 컨트롤러가 Running인지 확인 후 캡처</a:t>
             </a:r>
@@ -5184,6 +5206,8 @@
                   <a:srgbClr val="0D9488"/>
                 </a:solidFill>
                 <a:latin typeface="맑은 고딕"/>
+                <a:ea typeface="맑은 고딕"/>
+                <a:cs typeface="맑은 고딕"/>
               </a:rPr>
               <a:t>●  </a:t>
             </a:r>
@@ -5193,6 +5217,8 @@
                   <a:srgbClr val="222733"/>
                 </a:solidFill>
                 <a:latin typeface="맑은 고딕"/>
+                <a:ea typeface="맑은 고딕"/>
+                <a:cs typeface="맑은 고딕"/>
               </a:rPr>
               <a:t>다음 2차시에 이 컨트롤러를 이용해 실제 라우팅 규칙을 만들어봅니다</a:t>
             </a:r>
@@ -5228,6 +5254,8 @@
                   <a:srgbClr val="5B6373"/>
                 </a:solidFill>
                 <a:latin typeface="맑은 고딕"/>
+                <a:ea typeface="맑은 고딕"/>
+                <a:cs typeface="맑은 고딕"/>
               </a:rPr>
               <a:t>클라우드인프라관리  ·  7주차 1차시</a:t>
             </a:r>
@@ -5263,6 +5291,8 @@
                   <a:srgbClr val="5B6373"/>
                 </a:solidFill>
                 <a:latin typeface="맑은 고딕"/>
+                <a:ea typeface="맑은 고딕"/>
+                <a:cs typeface="맑은 고딕"/>
               </a:rPr>
               <a:t>10 / 12</a:t>
             </a:r>
@@ -5448,6 +5478,8 @@
                   <a:srgbClr val="FFFFFF"/>
                 </a:solidFill>
                 <a:latin typeface="맑은 고딕"/>
+                <a:ea typeface="맑은 고딕"/>
+                <a:cs typeface="맑은 고딕"/>
               </a:rPr>
               <a:t>오늘의 정리</a:t>
             </a:r>
@@ -5501,6 +5533,8 @@
                   <a:srgbClr val="14213D"/>
                 </a:solidFill>
                 <a:latin typeface="맑은 고딕"/>
+                <a:ea typeface="맑은 고딕"/>
+                <a:cs typeface="맑은 고딕"/>
               </a:rPr>
               <a:t>1</a:t>
             </a:r>
@@ -5536,6 +5570,8 @@
                   <a:srgbClr val="FFFFFF"/>
                 </a:solidFill>
                 <a:latin typeface="맑은 고딕"/>
+                <a:ea typeface="맑은 고딕"/>
+                <a:cs typeface="맑은 고딕"/>
               </a:rPr>
               <a:t>Ingress는 클러스터 외부 요청을 도메인/경로 규칙에 따라 알맞은 Service로 안내한다</a:t>
             </a:r>
@@ -5589,6 +5625,8 @@
                   <a:srgbClr val="14213D"/>
                 </a:solidFill>
                 <a:latin typeface="맑은 고딕"/>
+                <a:ea typeface="맑은 고딕"/>
+                <a:cs typeface="맑은 고딕"/>
               </a:rPr>
               <a:t>2</a:t>
             </a:r>
@@ -5624,6 +5662,8 @@
                   <a:srgbClr val="FFFFFF"/>
                 </a:solidFill>
                 <a:latin typeface="맑은 고딕"/>
+                <a:ea typeface="맑은 고딕"/>
+                <a:cs typeface="맑은 고딕"/>
               </a:rPr>
               <a:t>외부에서는 Ingress 하나의 주소만 알면, 여러 Service를 포트 번호 없이 이용할 수 있다</a:t>
             </a:r>
@@ -5765,6 +5805,8 @@
                   <a:srgbClr val="FFFFFF"/>
                 </a:solidFill>
                 <a:latin typeface="맑은 고딕"/>
+                <a:ea typeface="맑은 고딕"/>
+                <a:cs typeface="맑은 고딕"/>
               </a:rPr>
               <a:t>다음 차시 예고</a:t>
             </a:r>
@@ -5800,6 +5842,8 @@
                   <a:srgbClr val="14B8A6"/>
                 </a:solidFill>
                 <a:latin typeface="맑은 고딕"/>
+                <a:ea typeface="맑은 고딕"/>
+                <a:cs typeface="맑은 고딕"/>
               </a:rPr>
               <a:t>다음 차시 예고 — 7주차 2차시</a:t>
             </a:r>
@@ -5835,6 +5879,8 @@
                   <a:srgbClr val="FFFFFF"/>
                 </a:solidFill>
                 <a:latin typeface="맑은 고딕"/>
+                <a:ea typeface="맑은 고딕"/>
+                <a:cs typeface="맑은 고딕"/>
               </a:rPr>
               <a:t>오늘 활성화한 Ingress 컨트롤러를 이용해, hosts 파일로 가짜 도메인을 만들고 실제로 도메인 주소로 서비스에 접속하는 라우팅 규칙을 직접 작성합니다.</a:t>
             </a:r>
@@ -5976,6 +6022,8 @@
                   <a:srgbClr val="14B8A6"/>
                 </a:solidFill>
                 <a:latin typeface="맑은 고딕"/>
+                <a:ea typeface="맑은 고딕"/>
+                <a:cs typeface="맑은 고딕"/>
               </a:rPr>
               <a:t>SESSION OVERVIEW</a:t>
             </a:r>
@@ -6011,6 +6059,8 @@
                   <a:srgbClr val="FFFFFF"/>
                 </a:solidFill>
                 <a:latin typeface="맑은 고딕"/>
+                <a:ea typeface="맑은 고딕"/>
+                <a:cs typeface="맑은 고딕"/>
               </a:rPr>
               <a:t>오늘의 학습 목표</a:t>
             </a:r>
@@ -6050,6 +6100,8 @@
                   <a:srgbClr val="222733"/>
                 </a:solidFill>
                 <a:latin typeface="맑은 고딕"/>
+                <a:ea typeface="맑은 고딕"/>
+                <a:cs typeface="맑은 고딕"/>
               </a:rPr>
               <a:t>1.  Service만으로는 부족한 상황을 이해한다</a:t>
             </a:r>
@@ -6066,6 +6118,8 @@
                   <a:srgbClr val="222733"/>
                 </a:solidFill>
                 <a:latin typeface="맑은 고딕"/>
+                <a:ea typeface="맑은 고딕"/>
+                <a:cs typeface="맑은 고딕"/>
               </a:rPr>
               <a:t>2.  Ingress가 무엇이고 왜 필요한지 이해한다</a:t>
             </a:r>
@@ -6082,6 +6136,8 @@
                   <a:srgbClr val="222733"/>
                 </a:solidFill>
                 <a:latin typeface="맑은 고딕"/>
+                <a:ea typeface="맑은 고딕"/>
+                <a:cs typeface="맑은 고딕"/>
               </a:rPr>
               <a:t>3.  Ingress의 도메인/경로 기반 라우팅 원리를 이해한다</a:t>
             </a:r>
@@ -6117,6 +6173,8 @@
                   <a:srgbClr val="5B6373"/>
                 </a:solidFill>
                 <a:latin typeface="맑은 고딕"/>
+                <a:ea typeface="맑은 고딕"/>
+                <a:cs typeface="맑은 고딕"/>
               </a:rPr>
               <a:t>클라우드인프라관리  ·  7주차 1차시</a:t>
             </a:r>
@@ -6152,6 +6210,8 @@
                   <a:srgbClr val="5B6373"/>
                 </a:solidFill>
                 <a:latin typeface="맑은 고딕"/>
+                <a:ea typeface="맑은 고딕"/>
+                <a:cs typeface="맑은 고딕"/>
               </a:rPr>
               <a:t>02 / 12</a:t>
             </a:r>
@@ -6337,6 +6397,8 @@
                   <a:srgbClr val="14B8A6"/>
                 </a:solidFill>
                 <a:latin typeface="맑은 고딕"/>
+                <a:ea typeface="맑은 고딕"/>
+                <a:cs typeface="맑은 고딕"/>
               </a:rPr>
               <a:t>SESSION OVERVIEW</a:t>
             </a:r>
@@ -6372,6 +6434,8 @@
                   <a:srgbClr val="FFFFFF"/>
                 </a:solidFill>
                 <a:latin typeface="맑은 고딕"/>
+                <a:ea typeface="맑은 고딕"/>
+                <a:cs typeface="맑은 고딕"/>
               </a:rPr>
               <a:t>오늘의 진행 순서</a:t>
             </a:r>
@@ -6583,6 +6647,8 @@
                   <a:srgbClr val="FFFFFF"/>
                 </a:solidFill>
                 <a:latin typeface="맑은 고딕"/>
+                <a:ea typeface="맑은 고딕"/>
+                <a:cs typeface="맑은 고딕"/>
               </a:rPr>
               <a:t>1</a:t>
             </a:r>
@@ -6666,6 +6732,8 @@
                   <a:srgbClr val="14213D"/>
                 </a:solidFill>
                 <a:latin typeface="맑은 고딕"/>
+                <a:ea typeface="맑은 고딕"/>
+                <a:cs typeface="맑은 고딕"/>
               </a:rPr>
               <a:t>개념 설명</a:t>
             </a:r>
@@ -6705,6 +6773,8 @@
                   <a:srgbClr val="222733"/>
                 </a:solidFill>
                 <a:latin typeface="맑은 고딕"/>
+                <a:ea typeface="맑은 고딕"/>
+                <a:cs typeface="맑은 고딕"/>
               </a:rPr>
               <a:t>강의자료 기반 직접 강의</a:t>
             </a:r>
@@ -6784,6 +6854,8 @@
                   <a:srgbClr val="FFFFFF"/>
                 </a:solidFill>
                 <a:latin typeface="맑은 고딕"/>
+                <a:ea typeface="맑은 고딕"/>
+                <a:cs typeface="맑은 고딕"/>
               </a:rPr>
               <a:t>2</a:t>
             </a:r>
@@ -6867,6 +6939,8 @@
                   <a:srgbClr val="14213D"/>
                 </a:solidFill>
                 <a:latin typeface="맑은 고딕"/>
+                <a:ea typeface="맑은 고딕"/>
+                <a:cs typeface="맑은 고딕"/>
               </a:rPr>
               <a:t>Killercoda</a:t>
             </a:r>
@@ -6906,6 +6980,8 @@
                   <a:srgbClr val="222733"/>
                 </a:solidFill>
                 <a:latin typeface="맑은 고딕"/>
+                <a:ea typeface="맑은 고딕"/>
+                <a:cs typeface="맑은 고딕"/>
               </a:rPr>
               <a:t>Ingress 존재 확인·구조 탐색</a:t>
             </a:r>
@@ -6985,6 +7061,8 @@
                   <a:srgbClr val="FFFFFF"/>
                 </a:solidFill>
                 <a:latin typeface="맑은 고딕"/>
+                <a:ea typeface="맑은 고딕"/>
+                <a:cs typeface="맑은 고딕"/>
               </a:rPr>
               <a:t>3</a:t>
             </a:r>
@@ -7068,6 +7146,8 @@
                   <a:srgbClr val="14213D"/>
                 </a:solidFill>
                 <a:latin typeface="맑은 고딕"/>
+                <a:ea typeface="맑은 고딕"/>
+                <a:cs typeface="맑은 고딕"/>
               </a:rPr>
               <a:t>VM 안내</a:t>
             </a:r>
@@ -7107,6 +7187,8 @@
                   <a:srgbClr val="222733"/>
                 </a:solidFill>
                 <a:latin typeface="맑은 고딕"/>
+                <a:ea typeface="맑은 고딕"/>
+                <a:cs typeface="맑은 고딕"/>
               </a:rPr>
               <a:t>VM 환경 사전 점검</a:t>
             </a:r>
@@ -7186,6 +7268,8 @@
                   <a:srgbClr val="FFFFFF"/>
                 </a:solidFill>
                 <a:latin typeface="맑은 고딕"/>
+                <a:ea typeface="맑은 고딕"/>
+                <a:cs typeface="맑은 고딕"/>
               </a:rPr>
               <a:t>4</a:t>
             </a:r>
@@ -7269,6 +7353,8 @@
                   <a:srgbClr val="14213D"/>
                 </a:solidFill>
                 <a:latin typeface="맑은 고딕"/>
+                <a:ea typeface="맑은 고딕"/>
+                <a:cs typeface="맑은 고딕"/>
               </a:rPr>
               <a:t>결과 제출</a:t>
             </a:r>
@@ -7308,6 +7394,8 @@
                   <a:srgbClr val="222733"/>
                 </a:solidFill>
                 <a:latin typeface="맑은 고딕"/>
+                <a:ea typeface="맑은 고딕"/>
+                <a:cs typeface="맑은 고딕"/>
               </a:rPr>
               <a:t>체크리스트 제출</a:t>
             </a:r>
@@ -7343,6 +7431,8 @@
                   <a:srgbClr val="5B6373"/>
                 </a:solidFill>
                 <a:latin typeface="맑은 고딕"/>
+                <a:ea typeface="맑은 고딕"/>
+                <a:cs typeface="맑은 고딕"/>
               </a:rPr>
               <a:t>클라우드인프라관리  ·  7주차 1차시</a:t>
             </a:r>
@@ -7378,6 +7468,8 @@
                   <a:srgbClr val="5B6373"/>
                 </a:solidFill>
                 <a:latin typeface="맑은 고딕"/>
+                <a:ea typeface="맑은 고딕"/>
+                <a:cs typeface="맑은 고딕"/>
               </a:rPr>
               <a:t>03 / 12</a:t>
             </a:r>
@@ -7581,6 +7673,8 @@
                   <a:srgbClr val="14213D"/>
                 </a:solidFill>
                 <a:latin typeface="맑은 고딕"/>
+                <a:ea typeface="맑은 고딕"/>
+                <a:cs typeface="맑은 고딕"/>
               </a:rPr>
               <a:t>PART 01</a:t>
             </a:r>
@@ -7616,6 +7710,8 @@
                   <a:srgbClr val="FFFFFF"/>
                 </a:solidFill>
                 <a:latin typeface="맑은 고딕"/>
+                <a:ea typeface="맑은 고딕"/>
+                <a:cs typeface="맑은 고딕"/>
               </a:rPr>
               <a:t>Service만으로는 부족하다</a:t>
             </a:r>
@@ -7651,6 +7747,8 @@
                   <a:srgbClr val="C9D3E6"/>
                 </a:solidFill>
                 <a:latin typeface="맑은 고딕"/>
+                <a:ea typeface="맑은 고딕"/>
+                <a:cs typeface="맑은 고딕"/>
               </a:rPr>
               <a:t>여러 서비스가 늘어날수록</a:t>
             </a:r>
@@ -7810,6 +7908,8 @@
                   <a:srgbClr val="14213D"/>
                 </a:solidFill>
                 <a:latin typeface="맑은 고딕"/>
+                <a:ea typeface="맑은 고딕"/>
+                <a:cs typeface="맑은 고딕"/>
               </a:rPr>
               <a:t>01</a:t>
             </a:r>
@@ -7845,6 +7945,8 @@
                   <a:srgbClr val="14B8A6"/>
                 </a:solidFill>
                 <a:latin typeface="맑은 고딕"/>
+                <a:ea typeface="맑은 고딕"/>
+                <a:cs typeface="맑은 고딕"/>
               </a:rPr>
               <a:t>PART 1 · Service의 한계</a:t>
             </a:r>
@@ -7880,6 +7982,8 @@
                   <a:srgbClr val="FFFFFF"/>
                 </a:solidFill>
                 <a:latin typeface="맑은 고딕"/>
+                <a:ea typeface="맑은 고딕"/>
+                <a:cs typeface="맑은 고딕"/>
               </a:rPr>
               <a:t>서비스가 여러 개라면?</a:t>
             </a:r>
@@ -7919,6 +8023,8 @@
                   <a:srgbClr val="0D9488"/>
                 </a:solidFill>
                 <a:latin typeface="맑은 고딕"/>
+                <a:ea typeface="맑은 고딕"/>
+                <a:cs typeface="맑은 고딕"/>
               </a:rPr>
               <a:t>●  </a:t>
             </a:r>
@@ -7928,6 +8034,8 @@
                   <a:srgbClr val="222733"/>
                 </a:solidFill>
                 <a:latin typeface="맑은 고딕"/>
+                <a:ea typeface="맑은 고딕"/>
+                <a:cs typeface="맑은 고딕"/>
               </a:rPr>
               <a:t>5주차에서 배운 NodePort는 서비스마다 다른 포트 번호를 외워야 함</a:t>
             </a:r>
@@ -7944,6 +8052,8 @@
                   <a:srgbClr val="0D9488"/>
                 </a:solidFill>
                 <a:latin typeface="맑은 고딕"/>
+                <a:ea typeface="맑은 고딕"/>
+                <a:cs typeface="맑은 고딕"/>
               </a:rPr>
               <a:t>●  </a:t>
             </a:r>
@@ -7953,6 +8063,8 @@
                   <a:srgbClr val="222733"/>
                 </a:solidFill>
                 <a:latin typeface="맑은 고딕"/>
+                <a:ea typeface="맑은 고딕"/>
+                <a:cs typeface="맑은 고딕"/>
               </a:rPr>
               <a:t>서비스가 3개, 5개로 늘어나면 포트 번호 관리가 점점 번거로워짐</a:t>
             </a:r>
@@ -7969,6 +8081,8 @@
                   <a:srgbClr val="0D9488"/>
                 </a:solidFill>
                 <a:latin typeface="맑은 고딕"/>
+                <a:ea typeface="맑은 고딕"/>
+                <a:cs typeface="맑은 고딕"/>
               </a:rPr>
               <a:t>●  </a:t>
             </a:r>
@@ -7978,6 +8092,8 @@
                   <a:srgbClr val="222733"/>
                 </a:solidFill>
                 <a:latin typeface="맑은 고딕"/>
+                <a:ea typeface="맑은 고딕"/>
+                <a:cs typeface="맑은 고딕"/>
               </a:rPr>
               <a:t>외부 사용자 입장에서도 '포트 번호'가 아니라 '도메인 주소'로 접속하고 싶음</a:t>
             </a:r>
@@ -8057,6 +8173,8 @@
                   <a:srgbClr val="FFFFFF"/>
                 </a:solidFill>
                 <a:latin typeface="맑은 고딕"/>
+                <a:ea typeface="맑은 고딕"/>
+                <a:cs typeface="맑은 고딕"/>
               </a:rPr>
               <a:t>🤔  예: 블로그도, 쇼핑몰도, API도 각각 다른 Service</a:t>
             </a:r>
@@ -8092,6 +8210,8 @@
                   <a:srgbClr val="FFFFFF"/>
                 </a:solidFill>
                 <a:latin typeface="맑은 고딕"/>
+                <a:ea typeface="맑은 고딕"/>
+                <a:cs typeface="맑은 고딕"/>
               </a:rPr>
               <a:t>blog.mysite.com, shop.mysite.com처럼 도메인으로 구분해서 접속하고 싶다</a:t>
             </a:r>
@@ -8127,6 +8247,8 @@
                   <a:srgbClr val="5B6373"/>
                 </a:solidFill>
                 <a:latin typeface="맑은 고딕"/>
+                <a:ea typeface="맑은 고딕"/>
+                <a:cs typeface="맑은 고딕"/>
               </a:rPr>
               <a:t>클라우드인프라관리  ·  7주차 1차시</a:t>
             </a:r>
@@ -8162,6 +8284,8 @@
                   <a:srgbClr val="5B6373"/>
                 </a:solidFill>
                 <a:latin typeface="맑은 고딕"/>
+                <a:ea typeface="맑은 고딕"/>
+                <a:cs typeface="맑은 고딕"/>
               </a:rPr>
               <a:t>05 / 12</a:t>
             </a:r>
@@ -8365,6 +8489,8 @@
                   <a:srgbClr val="14213D"/>
                 </a:solidFill>
                 <a:latin typeface="맑은 고딕"/>
+                <a:ea typeface="맑은 고딕"/>
+                <a:cs typeface="맑은 고딕"/>
               </a:rPr>
               <a:t>PART 02</a:t>
             </a:r>
@@ -8400,6 +8526,8 @@
                   <a:srgbClr val="FFFFFF"/>
                 </a:solidFill>
                 <a:latin typeface="맑은 고딕"/>
+                <a:ea typeface="맑은 고딕"/>
+                <a:cs typeface="맑은 고딕"/>
               </a:rPr>
               <a:t>Ingress란?</a:t>
             </a:r>
@@ -8435,6 +8563,8 @@
                   <a:srgbClr val="C9D3E6"/>
                 </a:solidFill>
                 <a:latin typeface="맑은 고딕"/>
+                <a:ea typeface="맑은 고딕"/>
+                <a:cs typeface="맑은 고딕"/>
               </a:rPr>
               <a:t>하나의 진입점, 여러 목적지</a:t>
             </a:r>
@@ -8594,6 +8724,8 @@
                   <a:srgbClr val="14213D"/>
                 </a:solidFill>
                 <a:latin typeface="맑은 고딕"/>
+                <a:ea typeface="맑은 고딕"/>
+                <a:cs typeface="맑은 고딕"/>
               </a:rPr>
               <a:t>02</a:t>
             </a:r>
@@ -8629,6 +8761,8 @@
                   <a:srgbClr val="14B8A6"/>
                 </a:solidFill>
                 <a:latin typeface="맑은 고딕"/>
+                <a:ea typeface="맑은 고딕"/>
+                <a:cs typeface="맑은 고딕"/>
               </a:rPr>
               <a:t>PART 2 · Ingress란?</a:t>
             </a:r>
@@ -8664,6 +8798,8 @@
                   <a:srgbClr val="FFFFFF"/>
                 </a:solidFill>
                 <a:latin typeface="맑은 고딕"/>
+                <a:ea typeface="맑은 고딕"/>
+                <a:cs typeface="맑은 고딕"/>
               </a:rPr>
               <a:t>하나의 진입점으로 여러 서비스 연결</a:t>
             </a:r>
@@ -8703,6 +8839,8 @@
                   <a:srgbClr val="0D9488"/>
                 </a:solidFill>
                 <a:latin typeface="맑은 고딕"/>
+                <a:ea typeface="맑은 고딕"/>
+                <a:cs typeface="맑은 고딕"/>
               </a:rPr>
               <a:t>●  </a:t>
             </a:r>
@@ -8712,6 +8850,8 @@
                   <a:srgbClr val="222733"/>
                 </a:solidFill>
                 <a:latin typeface="맑은 고딕"/>
+                <a:ea typeface="맑은 고딕"/>
+                <a:cs typeface="맑은 고딕"/>
               </a:rPr>
               <a:t>Ingress = 클러스터 외부 요청을 받아, 규칙에 따라 알맞은 Service로 안내하는 K8s 오브젝트</a:t>
             </a:r>
@@ -8728,6 +8868,8 @@
                   <a:srgbClr val="0D9488"/>
                 </a:solidFill>
                 <a:latin typeface="맑은 고딕"/>
+                <a:ea typeface="맑은 고딕"/>
+                <a:cs typeface="맑은 고딕"/>
               </a:rPr>
               <a:t>●  </a:t>
             </a:r>
@@ -8737,6 +8879,8 @@
                   <a:srgbClr val="222733"/>
                 </a:solidFill>
                 <a:latin typeface="맑은 고딕"/>
+                <a:ea typeface="맑은 고딕"/>
+                <a:cs typeface="맑은 고딕"/>
               </a:rPr>
               <a:t>L7(애플리케이션 계층) 라우팅 — 도메인 주소나 URL 경로를 보고 목적지를 결정</a:t>
             </a:r>
@@ -8753,6 +8897,8 @@
                   <a:srgbClr val="0D9488"/>
                 </a:solidFill>
                 <a:latin typeface="맑은 고딕"/>
+                <a:ea typeface="맑은 고딕"/>
+                <a:cs typeface="맑은 고딕"/>
               </a:rPr>
               <a:t>●  </a:t>
             </a:r>
@@ -8762,6 +8908,8 @@
                   <a:srgbClr val="222733"/>
                 </a:solidFill>
                 <a:latin typeface="맑은 고딕"/>
+                <a:ea typeface="맑은 고딕"/>
+                <a:cs typeface="맑은 고딕"/>
               </a:rPr>
               <a:t>외부에서는 Ingress 하나의 주소만 알면 되고, 나머지는 Ingress가 알아서 분배</a:t>
             </a:r>
@@ -8797,6 +8945,8 @@
                   <a:srgbClr val="14213D"/>
                 </a:solidFill>
                 <a:latin typeface="맑은 고딕"/>
+                <a:ea typeface="맑은 고딕"/>
+                <a:cs typeface="맑은 고딕"/>
               </a:rPr>
               <a:t>Ingress 구조</a:t>
             </a:r>
@@ -8876,6 +9026,8 @@
                   <a:srgbClr val="FFFFFF"/>
                 </a:solidFill>
                 <a:latin typeface="맑은 고딕"/>
+                <a:ea typeface="맑은 고딕"/>
+                <a:cs typeface="맑은 고딕"/>
               </a:rPr>
               <a:t>외부 요청 (도메인/경로)</a:t>
             </a:r>
@@ -8955,6 +9107,8 @@
                   <a:srgbClr val="FFFFFF"/>
                 </a:solidFill>
                 <a:latin typeface="맑은 고딕"/>
+                <a:ea typeface="맑은 고딕"/>
+                <a:cs typeface="맑은 고딕"/>
               </a:rPr>
               <a:t>Ingress (라우팅 규칙 판단)</a:t>
             </a:r>
@@ -9034,6 +9188,8 @@
                   <a:srgbClr val="FFFFFF"/>
                 </a:solidFill>
                 <a:latin typeface="맑은 고딕"/>
+                <a:ea typeface="맑은 고딕"/>
+                <a:cs typeface="맑은 고딕"/>
               </a:rPr>
               <a:t>Service A / Service B / Service C</a:t>
             </a:r>
@@ -9069,6 +9225,8 @@
                   <a:srgbClr val="5B6373"/>
                 </a:solidFill>
                 <a:latin typeface="맑은 고딕"/>
+                <a:ea typeface="맑은 고딕"/>
+                <a:cs typeface="맑은 고딕"/>
               </a:rPr>
               <a:t>클라우드인프라관리  ·  7주차 1차시</a:t>
             </a:r>
@@ -9104,6 +9262,8 @@
                   <a:srgbClr val="5B6373"/>
                 </a:solidFill>
                 <a:latin typeface="맑은 고딕"/>
+                <a:ea typeface="맑은 고딕"/>
+                <a:cs typeface="맑은 고딕"/>
               </a:rPr>
               <a:t>07 / 12</a:t>
             </a:r>
@@ -9307,6 +9467,8 @@
                   <a:srgbClr val="14213D"/>
                 </a:solidFill>
                 <a:latin typeface="맑은 고딕"/>
+                <a:ea typeface="맑은 고딕"/>
+                <a:cs typeface="맑은 고딕"/>
               </a:rPr>
               <a:t>02</a:t>
             </a:r>
@@ -9342,6 +9504,8 @@
                   <a:srgbClr val="14B8A6"/>
                 </a:solidFill>
                 <a:latin typeface="맑은 고딕"/>
+                <a:ea typeface="맑은 고딕"/>
+                <a:cs typeface="맑은 고딕"/>
               </a:rPr>
               <a:t>PART 2 · Ingress란?</a:t>
             </a:r>
@@ -9377,6 +9541,8 @@
                   <a:srgbClr val="FFFFFF"/>
                 </a:solidFill>
                 <a:latin typeface="맑은 고딕"/>
+                <a:ea typeface="맑은 고딕"/>
+                <a:cs typeface="맑은 고딕"/>
               </a:rPr>
               <a:t>라우팅 규칙의 두 가지 방식</a:t>
             </a:r>
@@ -9416,6 +9582,8 @@
                   <a:srgbClr val="0D9488"/>
                 </a:solidFill>
                 <a:latin typeface="맑은 고딕"/>
+                <a:ea typeface="맑은 고딕"/>
+                <a:cs typeface="맑은 고딕"/>
               </a:rPr>
               <a:t>●  </a:t>
             </a:r>
@@ -9425,6 +9593,8 @@
                   <a:srgbClr val="222733"/>
                 </a:solidFill>
                 <a:latin typeface="맑은 고딕"/>
+                <a:ea typeface="맑은 고딕"/>
+                <a:cs typeface="맑은 고딕"/>
               </a:rPr>
               <a:t>도메인 기반: blog.mysite.com → Service A, shop.mysite.com → Service B</a:t>
             </a:r>
@@ -9441,6 +9611,8 @@
                   <a:srgbClr val="0D9488"/>
                 </a:solidFill>
                 <a:latin typeface="맑은 고딕"/>
+                <a:ea typeface="맑은 고딕"/>
+                <a:cs typeface="맑은 고딕"/>
               </a:rPr>
               <a:t>●  </a:t>
             </a:r>
@@ -9450,6 +9622,8 @@
                   <a:srgbClr val="222733"/>
                 </a:solidFill>
                 <a:latin typeface="맑은 고딕"/>
+                <a:ea typeface="맑은 고딕"/>
+                <a:cs typeface="맑은 고딕"/>
               </a:rPr>
               <a:t>경로 기반: mysite.com/ko → 한국어 서비스, mysite.com/en → 영어 서비스</a:t>
             </a:r>
@@ -9466,6 +9640,8 @@
                   <a:srgbClr val="0D9488"/>
                 </a:solidFill>
                 <a:latin typeface="맑은 고딕"/>
+                <a:ea typeface="맑은 고딕"/>
+                <a:cs typeface="맑은 고딕"/>
               </a:rPr>
               <a:t>●  </a:t>
             </a:r>
@@ -9475,6 +9651,8 @@
                   <a:srgbClr val="222733"/>
                 </a:solidFill>
                 <a:latin typeface="맑은 고딕"/>
+                <a:ea typeface="맑은 고딕"/>
+                <a:cs typeface="맑은 고딕"/>
               </a:rPr>
               <a:t>Ingress 리소스에 이 규칙들을 YAML로 선언하면, Ingress 컨트롤러가 실제로 트래픽을 분배</a:t>
             </a:r>
@@ -9510,6 +9688,8 @@
                   <a:srgbClr val="5B6373"/>
                 </a:solidFill>
                 <a:latin typeface="맑은 고딕"/>
+                <a:ea typeface="맑은 고딕"/>
+                <a:cs typeface="맑은 고딕"/>
               </a:rPr>
               <a:t>클라우드인프라관리  ·  7주차 1차시</a:t>
             </a:r>
@@ -9545,6 +9725,8 @@
                   <a:srgbClr val="5B6373"/>
                 </a:solidFill>
                 <a:latin typeface="맑은 고딕"/>
+                <a:ea typeface="맑은 고딕"/>
+                <a:cs typeface="맑은 고딕"/>
               </a:rPr>
               <a:t>08 / 12</a:t>
             </a:r>
@@ -9748,6 +9930,8 @@
                   <a:srgbClr val="14213D"/>
                 </a:solidFill>
                 <a:latin typeface="맑은 고딕"/>
+                <a:ea typeface="맑은 고딕"/>
+                <a:cs typeface="맑은 고딕"/>
               </a:rPr>
               <a:t>03</a:t>
             </a:r>
@@ -9783,6 +9967,8 @@
                   <a:srgbClr val="14B8A6"/>
                 </a:solidFill>
                 <a:latin typeface="맑은 고딕"/>
+                <a:ea typeface="맑은 고딕"/>
+                <a:cs typeface="맑은 고딕"/>
               </a:rPr>
               <a:t>실습 안내</a:t>
             </a:r>
@@ -9818,6 +10004,8 @@
                   <a:srgbClr val="FFFFFF"/>
                 </a:solidFill>
                 <a:latin typeface="맑은 고딕"/>
+                <a:ea typeface="맑은 고딕"/>
+                <a:cs typeface="맑은 고딕"/>
               </a:rPr>
               <a:t>Killercoda — Ingress 존재 확인·구조 탐색</a:t>
             </a:r>
@@ -9857,6 +10045,8 @@
                   <a:srgbClr val="0D9488"/>
                 </a:solidFill>
                 <a:latin typeface="맑은 고딕"/>
+                <a:ea typeface="맑은 고딕"/>
+                <a:cs typeface="맑은 고딕"/>
               </a:rPr>
               <a:t>●  </a:t>
             </a:r>
@@ -9866,6 +10056,8 @@
                   <a:srgbClr val="222733"/>
                 </a:solidFill>
                 <a:latin typeface="맑은 고딕"/>
+                <a:ea typeface="맑은 고딕"/>
+                <a:cs typeface="맑은 고딕"/>
               </a:rPr>
               <a:t>minikube addons enable ingress 로 Ingress 컨트롤러 활성화</a:t>
             </a:r>
@@ -9882,6 +10074,8 @@
                   <a:srgbClr val="0D9488"/>
                 </a:solidFill>
                 <a:latin typeface="맑은 고딕"/>
+                <a:ea typeface="맑은 고딕"/>
+                <a:cs typeface="맑은 고딕"/>
               </a:rPr>
               <a:t>●  </a:t>
             </a:r>
@@ -9891,6 +10085,8 @@
                   <a:srgbClr val="222733"/>
                 </a:solidFill>
                 <a:latin typeface="맑은 고딕"/>
+                <a:ea typeface="맑은 고딕"/>
+                <a:cs typeface="맑은 고딕"/>
               </a:rPr>
               <a:t>kubectl get pods -n ingress-nginx 로 컨트롤러 Pod 확인</a:t>
             </a:r>
@@ -9907,6 +10103,8 @@
                   <a:srgbClr val="0D9488"/>
                 </a:solidFill>
                 <a:latin typeface="맑은 고딕"/>
+                <a:ea typeface="맑은 고딕"/>
+                <a:cs typeface="맑은 고딕"/>
               </a:rPr>
               <a:t>●  </a:t>
             </a:r>
@@ -9916,6 +10114,8 @@
                   <a:srgbClr val="222733"/>
                 </a:solidFill>
                 <a:latin typeface="맑은 고딕"/>
+                <a:ea typeface="맑은 고딕"/>
+                <a:cs typeface="맑은 고딕"/>
               </a:rPr>
               <a:t>기존 ingress-nginx 예제 YAML을 kubectl explain ingress로 구조 살펴보기</a:t>
             </a:r>
@@ -9951,6 +10151,8 @@
                   <a:srgbClr val="5B6373"/>
                 </a:solidFill>
                 <a:latin typeface="맑은 고딕"/>
+                <a:ea typeface="맑은 고딕"/>
+                <a:cs typeface="맑은 고딕"/>
               </a:rPr>
               <a:t>클라우드인프라관리  ·  7주차 1차시</a:t>
             </a:r>
@@ -9986,6 +10188,8 @@
                   <a:srgbClr val="5B6373"/>
                 </a:solidFill>
                 <a:latin typeface="맑은 고딕"/>
+                <a:ea typeface="맑은 고딕"/>
+                <a:cs typeface="맑은 고딕"/>
               </a:rPr>
               <a:t>09 / 12</a:t>
             </a:r>

--- a/class/cloud_infra_mgmt/07주차_Kubernetes핵심3/01_강의자료/1차시_Ingress개념.pptx
+++ b/class/cloud_infra_mgmt/07주차_Kubernetes핵심3/01_강의자료/1차시_Ingress개념.pptx
@@ -10048,18 +10048,25 @@
                 <a:ea typeface="맑은 고딕"/>
                 <a:cs typeface="맑은 고딕"/>
               </a:rPr>
-              <a:t>●  </a:t>
-            </a:r>
-            <a:r>
-              <a:rPr sz="1700" b="0">
-                <a:solidFill>
-                  <a:srgbClr val="222733"/>
+              <a:t>●  (VM은 minikube addons enable ingress) 여기는 kubeadm이라 매니페스트로 직접 설치</a:t>
+            </a:r>
+          </a:p>
+          <a:p>
+            <a:pPr>
+              <a:lnSpc>
+                <a:spcPct val="149500"/>
+              </a:lnSpc>
+            </a:pPr>
+            <a:r>
+              <a:rPr sz="1700" b="1">
+                <a:solidFill>
+                  <a:srgbClr val="0D9488"/>
                 </a:solidFill>
                 <a:latin typeface="맑은 고딕"/>
                 <a:ea typeface="맑은 고딕"/>
                 <a:cs typeface="맑은 고딕"/>
               </a:rPr>
-              <a:t>minikube addons enable ingress 로 Ingress 컨트롤러 활성화</a:t>
+              <a:t>●  kubectl apply -f .../ingress-nginx/.../baremetal/deploy.yaml</a:t>
             </a:r>
           </a:p>
           <a:p>
